--- a/classes/parte-5-explotacion-de-sistemas-y-binarios/137-descubrimiento-de-vulnerabilidades-en-codigo/clase-137-presentacion.pptx
+++ b/classes/parte-5-explotacion-de-sistemas-y-binarios/137-descubrimiento-de-vulnerabilidades-en-codigo/clase-137-presentacion.pptx
@@ -17,6 +17,8 @@
     <p:sldId id="265" r:id="rId16"/>
     <p:sldId id="266" r:id="rId17"/>
     <p:sldId id="267" r:id="rId18"/>
+    <p:sldId id="268" r:id="rId19"/>
+    <p:sldId id="269" r:id="rId20"/>
   </p:sldIdLst>
   <p:sldSz cx="9144000" cy="6858000" type="screen4x3"/>
   <p:notesSz cx="6858000" cy="9144000"/>
@@ -3198,7 +3200,7 @@
                   <a:srgbClr val="0B3D2E"/>
                 </a:solidFill>
               </a:rPr>
-              <a:t>⚠️ Errores comunes</a:t>
+              <a:t>📝 Reto verificable</a:t>
             </a:r>
           </a:p>
         </p:txBody>
@@ -3236,67 +3238,52 @@
                   <a:srgbClr val="22282E"/>
                 </a:solidFill>
               </a:rPr>
-              <a:t>•  SAST ahoga en falsos positivos — Filtra por severidad y valida con taint manual</a:t>
-            </a:r>
-          </a:p>
-          <a:p>
-            <a:pPr>
-              <a:spcAft>
-                <a:spcPts val="600"/>
-              </a:spcAft>
-            </a:pPr>
-            <a:r>
-              <a:rPr sz="1500">
-                <a:solidFill>
-                  <a:srgbClr val="22282E"/>
-                </a:solidFill>
-              </a:rPr>
-              <a:t>•  No encuentras nada — No modelaste bien la superficie de ataque; empieza por los parsers</a:t>
-            </a:r>
-          </a:p>
-          <a:p>
-            <a:pPr>
-              <a:spcAft>
-                <a:spcPts val="600"/>
-              </a:spcAft>
-            </a:pPr>
-            <a:r>
-              <a:rPr sz="1500">
-                <a:solidFill>
-                  <a:srgbClr val="22282E"/>
-                </a:solidFill>
-              </a:rPr>
-              <a:t>•  CodeQL no compila la base — La query necesita una DB creada con codeql database create</a:t>
-            </a:r>
-          </a:p>
-          <a:p>
-            <a:pPr>
-              <a:spcAft>
-                <a:spcPts val="600"/>
-              </a:spcAft>
-            </a:pPr>
-            <a:r>
-              <a:rPr sz="1500">
-                <a:solidFill>
-                  <a:srgbClr val="22282E"/>
-                </a:solidFill>
-              </a:rPr>
-              <a:t>•  Reportas sin PoC — Debilita el reporte; incluye reproducción mínima</a:t>
-            </a:r>
-          </a:p>
-          <a:p>
-            <a:pPr>
-              <a:spcAft>
-                <a:spcPts val="600"/>
-              </a:spcAft>
-            </a:pPr>
-            <a:r>
-              <a:rPr sz="1500">
-                <a:solidFill>
-                  <a:srgbClr val="22282E"/>
-                </a:solidFill>
-              </a:rPr>
-              <a:t>•  Publicas un 0-day de terceros — Viola la ética; sigue disclosure coordinada</a:t>
+              <a:t>•  Audita un proyecto C pequeño (propio o open source con permiso), identifica una vulnerabilidad real,</a:t>
+            </a:r>
+          </a:p>
+          <a:p>
+            <a:pPr>
+              <a:spcAft>
+                <a:spcPts val="600"/>
+              </a:spcAft>
+            </a:pPr>
+            <a:r>
+              <a:rPr sz="1500">
+                <a:solidFill>
+                  <a:srgbClr val="22282E"/>
+                </a:solidFill>
+              </a:rPr>
+              <a:t>•  demuéstrala con una PoC mínima y redacta el reporte de divulgación.</a:t>
+            </a:r>
+          </a:p>
+          <a:p>
+            <a:pPr>
+              <a:spcAft>
+                <a:spcPts val="600"/>
+              </a:spcAft>
+            </a:pPr>
+            <a:r>
+              <a:rPr sz="1500">
+                <a:solidFill>
+                  <a:srgbClr val="22282E"/>
+                </a:solidFill>
+              </a:rPr>
+              <a:t>•  Criterio de aceptación: entregas la ubicación exacta del bug (archivo:línea), una PoC que lo</a:t>
+            </a:r>
+          </a:p>
+          <a:p>
+            <a:pPr>
+              <a:spcAft>
+                <a:spcPts val="600"/>
+              </a:spcAft>
+            </a:pPr>
+            <a:r>
+              <a:rPr sz="1500">
+                <a:solidFill>
+                  <a:srgbClr val="22282E"/>
+                </a:solidFill>
+              </a:rPr>
+              <a:t>•  dispara y un reporte con impacto, versiones y mitigación propuesta.</a:t>
             </a:r>
           </a:p>
         </p:txBody>
@@ -3347,7 +3334,7 @@
                   <a:srgbClr val="0B3D2E"/>
                 </a:solidFill>
               </a:rPr>
-              <a:t>❓ Preguntas frecuentes</a:t>
+              <a:t>⚠️ Errores comunes</a:t>
             </a:r>
           </a:p>
         </p:txBody>
@@ -3385,82 +3372,67 @@
                   <a:srgbClr val="22282E"/>
                 </a:solidFill>
               </a:rPr>
-              <a:t>•  ❓ ¿SAST reemplaza al fuzzing? No: SAST ve patrones sin ejecutar; fuzzing ejecuta y halla bugs de</a:t>
-            </a:r>
-          </a:p>
-          <a:p>
-            <a:pPr>
-              <a:spcAft>
-                <a:spcPts val="600"/>
-              </a:spcAft>
-            </a:pPr>
-            <a:r>
-              <a:rPr sz="1500">
-                <a:solidFill>
-                  <a:srgbClr val="22282E"/>
-                </a:solidFill>
-              </a:rPr>
-              <a:t>•  runtime. Son complementarios.</a:t>
-            </a:r>
-          </a:p>
-          <a:p>
-            <a:pPr>
-              <a:spcAft>
-                <a:spcPts val="600"/>
-              </a:spcAft>
-            </a:pPr>
-            <a:r>
-              <a:rPr sz="1500">
-                <a:solidFill>
-                  <a:srgbClr val="22282E"/>
-                </a:solidFill>
-              </a:rPr>
-              <a:t>•  ❓ ¿Cómo reporto responsablemente? Contacta al vendor/security.txt, aporta PoC, acuerda plazo</a:t>
-            </a:r>
-          </a:p>
-          <a:p>
-            <a:pPr>
-              <a:spcAft>
-                <a:spcPts val="600"/>
-              </a:spcAft>
-            </a:pPr>
-            <a:r>
-              <a:rPr sz="1500">
-                <a:solidFill>
-                  <a:srgbClr val="22282E"/>
-                </a:solidFill>
-              </a:rPr>
-              <a:t>•  (p. ej. 90 días) y coordina la publicación.</a:t>
-            </a:r>
-          </a:p>
-          <a:p>
-            <a:pPr>
-              <a:spcAft>
-                <a:spcPts val="600"/>
-              </a:spcAft>
-            </a:pPr>
-            <a:r>
-              <a:rPr sz="1500">
-                <a:solidFill>
-                  <a:srgbClr val="22282E"/>
-                </a:solidFill>
-              </a:rPr>
-              <a:t>•  ❓ ¿Todo hallazgo es una CVE? No: muchos son de baja explotabilidad o requieren condiciones</a:t>
-            </a:r>
-          </a:p>
-          <a:p>
-            <a:pPr>
-              <a:spcAft>
-                <a:spcPts val="600"/>
-              </a:spcAft>
-            </a:pPr>
-            <a:r>
-              <a:rPr sz="1500">
-                <a:solidFill>
-                  <a:srgbClr val="22282E"/>
-                </a:solidFill>
-              </a:rPr>
-              <a:t>•  irreales; prioriza.</a:t>
+              <a:t>•  SAST ahoga en falsos positivos — Filtra por severidad y valida con taint manual</a:t>
+            </a:r>
+          </a:p>
+          <a:p>
+            <a:pPr>
+              <a:spcAft>
+                <a:spcPts val="600"/>
+              </a:spcAft>
+            </a:pPr>
+            <a:r>
+              <a:rPr sz="1500">
+                <a:solidFill>
+                  <a:srgbClr val="22282E"/>
+                </a:solidFill>
+              </a:rPr>
+              <a:t>•  No encuentras nada — No modelaste bien la superficie de ataque; empieza por los parsers</a:t>
+            </a:r>
+          </a:p>
+          <a:p>
+            <a:pPr>
+              <a:spcAft>
+                <a:spcPts val="600"/>
+              </a:spcAft>
+            </a:pPr>
+            <a:r>
+              <a:rPr sz="1500">
+                <a:solidFill>
+                  <a:srgbClr val="22282E"/>
+                </a:solidFill>
+              </a:rPr>
+              <a:t>•  CodeQL no compila la base — La query necesita una DB creada con codeql database create</a:t>
+            </a:r>
+          </a:p>
+          <a:p>
+            <a:pPr>
+              <a:spcAft>
+                <a:spcPts val="600"/>
+              </a:spcAft>
+            </a:pPr>
+            <a:r>
+              <a:rPr sz="1500">
+                <a:solidFill>
+                  <a:srgbClr val="22282E"/>
+                </a:solidFill>
+              </a:rPr>
+              <a:t>•  Reportas sin PoC — Debilita el reporte; incluye reproducción mínima</a:t>
+            </a:r>
+          </a:p>
+          <a:p>
+            <a:pPr>
+              <a:spcAft>
+                <a:spcPts val="600"/>
+              </a:spcAft>
+            </a:pPr>
+            <a:r>
+              <a:rPr sz="1500">
+                <a:solidFill>
+                  <a:srgbClr val="22282E"/>
+                </a:solidFill>
+              </a:rPr>
+              <a:t>•  Publicas un 0-day de terceros — Viola la ética; sigue disclosure coordinada</a:t>
             </a:r>
           </a:p>
         </p:txBody>
@@ -3511,7 +3483,7 @@
                   <a:srgbClr val="0B3D2E"/>
                 </a:solidFill>
               </a:rPr>
-              <a:t>🔗 Referencias</a:t>
+              <a:t>❓ Preguntas frecuentes</a:t>
             </a:r>
           </a:p>
         </p:txBody>
@@ -3549,6 +3521,170 @@
                   <a:srgbClr val="22282E"/>
                 </a:solidFill>
               </a:rPr>
+              <a:t>•  ❓ ¿SAST reemplaza al fuzzing? No: SAST ve patrones sin ejecutar; fuzzing ejecuta y halla bugs de</a:t>
+            </a:r>
+          </a:p>
+          <a:p>
+            <a:pPr>
+              <a:spcAft>
+                <a:spcPts val="600"/>
+              </a:spcAft>
+            </a:pPr>
+            <a:r>
+              <a:rPr sz="1500">
+                <a:solidFill>
+                  <a:srgbClr val="22282E"/>
+                </a:solidFill>
+              </a:rPr>
+              <a:t>•  runtime. Son complementarios.</a:t>
+            </a:r>
+          </a:p>
+          <a:p>
+            <a:pPr>
+              <a:spcAft>
+                <a:spcPts val="600"/>
+              </a:spcAft>
+            </a:pPr>
+            <a:r>
+              <a:rPr sz="1500">
+                <a:solidFill>
+                  <a:srgbClr val="22282E"/>
+                </a:solidFill>
+              </a:rPr>
+              <a:t>•  ❓ ¿Cómo reporto responsablemente? Contacta al vendor/security.txt, aporta PoC, acuerda plazo</a:t>
+            </a:r>
+          </a:p>
+          <a:p>
+            <a:pPr>
+              <a:spcAft>
+                <a:spcPts val="600"/>
+              </a:spcAft>
+            </a:pPr>
+            <a:r>
+              <a:rPr sz="1500">
+                <a:solidFill>
+                  <a:srgbClr val="22282E"/>
+                </a:solidFill>
+              </a:rPr>
+              <a:t>•  (p. ej. 90 días) y coordina la publicación.</a:t>
+            </a:r>
+          </a:p>
+          <a:p>
+            <a:pPr>
+              <a:spcAft>
+                <a:spcPts val="600"/>
+              </a:spcAft>
+            </a:pPr>
+            <a:r>
+              <a:rPr sz="1500">
+                <a:solidFill>
+                  <a:srgbClr val="22282E"/>
+                </a:solidFill>
+              </a:rPr>
+              <a:t>•  ❓ ¿Todo hallazgo es una CVE? No: muchos son de baja explotabilidad o requieren condiciones</a:t>
+            </a:r>
+          </a:p>
+          <a:p>
+            <a:pPr>
+              <a:spcAft>
+                <a:spcPts val="600"/>
+              </a:spcAft>
+            </a:pPr>
+            <a:r>
+              <a:rPr sz="1500">
+                <a:solidFill>
+                  <a:srgbClr val="22282E"/>
+                </a:solidFill>
+              </a:rPr>
+              <a:t>•  irreales; prioriza.</a:t>
+            </a:r>
+          </a:p>
+        </p:txBody>
+      </p:sp>
+    </p:spTree>
+  </p:cSld>
+  <p:clrMapOvr>
+    <a:masterClrMapping/>
+  </p:clrMapOvr>
+</p:sld>
+</file>
+
+<file path=ppt/slides/slide13.xml><?xml version="1.0" encoding="utf-8"?>
+<p:sld xmlns:a="http://schemas.openxmlformats.org/drawingml/2006/main" xmlns:p="http://schemas.openxmlformats.org/presentationml/2006/main" xmlns:r="http://schemas.openxmlformats.org/officeDocument/2006/relationships">
+  <p:cSld>
+    <p:spTree>
+      <p:nvGrpSpPr>
+        <p:cNvPr id="1" name=""/>
+        <p:cNvGrpSpPr/>
+        <p:nvPr/>
+      </p:nvGrpSpPr>
+      <p:grpSpPr/>
+      <p:sp>
+        <p:nvSpPr>
+          <p:cNvPr id="2" name="TextBox 1"/>
+          <p:cNvSpPr txBox="1"/>
+          <p:nvPr/>
+        </p:nvSpPr>
+        <p:spPr>
+          <a:xfrm>
+            <a:off x="457200" y="320040"/>
+            <a:ext cx="8229600" cy="822960"/>
+          </a:xfrm>
+          <a:prstGeom prst="rect">
+            <a:avLst/>
+          </a:prstGeom>
+          <a:noFill/>
+        </p:spPr>
+        <p:txBody>
+          <a:bodyPr wrap="square">
+            <a:spAutoFit/>
+          </a:bodyPr>
+          <a:lstStyle/>
+          <a:p>
+            <a:r>
+              <a:rPr sz="2600" b="1">
+                <a:solidFill>
+                  <a:srgbClr val="0B3D2E"/>
+                </a:solidFill>
+              </a:rPr>
+              <a:t>🔗 Referencias</a:t>
+            </a:r>
+          </a:p>
+        </p:txBody>
+      </p:sp>
+      <p:sp>
+        <p:nvSpPr>
+          <p:cNvPr id="3" name="TextBox 2"/>
+          <p:cNvSpPr txBox="1"/>
+          <p:nvPr/>
+        </p:nvSpPr>
+        <p:spPr>
+          <a:xfrm>
+            <a:off x="457200" y="1280160"/>
+            <a:ext cx="8229600" cy="4937760"/>
+          </a:xfrm>
+          <a:prstGeom prst="rect">
+            <a:avLst/>
+          </a:prstGeom>
+          <a:noFill/>
+        </p:spPr>
+        <p:txBody>
+          <a:bodyPr wrap="square">
+            <a:spAutoFit/>
+          </a:bodyPr>
+          <a:lstStyle/>
+          <a:p>
+            <a:pPr>
+              <a:spcAft>
+                <a:spcPts val="600"/>
+              </a:spcAft>
+            </a:pPr>
+            <a:r>
+              <a:rPr sz="1500">
+                <a:solidFill>
+                  <a:srgbClr val="22282E"/>
+                </a:solidFill>
+              </a:rPr>
               <a:t>•  Dowd, McDonald, Schuh. The Art of Software Security Assessment. Addison-Wesley.</a:t>
             </a:r>
           </a:p>
@@ -3599,6 +3735,81 @@
           </a:p>
         </p:txBody>
       </p:sp>
+    </p:spTree>
+  </p:cSld>
+  <p:clrMapOvr>
+    <a:masterClrMapping/>
+  </p:clrMapOvr>
+</p:sld>
+</file>
+
+<file path=ppt/slides/slide14.xml><?xml version="1.0" encoding="utf-8"?>
+<p:sld xmlns:a="http://schemas.openxmlformats.org/drawingml/2006/main" xmlns:p="http://schemas.openxmlformats.org/presentationml/2006/main" xmlns:r="http://schemas.openxmlformats.org/officeDocument/2006/relationships">
+  <p:cSld>
+    <p:spTree>
+      <p:nvGrpSpPr>
+        <p:cNvPr id="1" name=""/>
+        <p:cNvGrpSpPr/>
+        <p:nvPr/>
+      </p:nvGrpSpPr>
+      <p:grpSpPr/>
+      <p:sp>
+        <p:nvSpPr>
+          <p:cNvPr id="2" name="TextBox 1"/>
+          <p:cNvSpPr txBox="1"/>
+          <p:nvPr/>
+        </p:nvSpPr>
+        <p:spPr>
+          <a:xfrm>
+            <a:off x="457200" y="274320"/>
+            <a:ext cx="8229600" cy="640080"/>
+          </a:xfrm>
+          <a:prstGeom prst="rect">
+            <a:avLst/>
+          </a:prstGeom>
+          <a:noFill/>
+        </p:spPr>
+        <p:txBody>
+          <a:bodyPr wrap="square">
+            <a:spAutoFit/>
+          </a:bodyPr>
+          <a:lstStyle/>
+          <a:p>
+            <a:r>
+              <a:rPr sz="2200" b="1">
+                <a:solidFill>
+                  <a:srgbClr val="0B3D2E"/>
+                </a:solidFill>
+              </a:rPr>
+              <a:t>Diagrama de la clase</a:t>
+            </a:r>
+          </a:p>
+        </p:txBody>
+      </p:sp>
+      <p:pic>
+        <p:nvPicPr>
+          <p:cNvPr id="3" name="Picture 2" descr="74c0711fbc09abeb.png"/>
+          <p:cNvPicPr>
+            <a:picLocks noChangeAspect="1"/>
+          </p:cNvPicPr>
+          <p:nvPr/>
+        </p:nvPicPr>
+        <p:blipFill>
+          <a:blip r:embed="rId2"/>
+          <a:stretch>
+            <a:fillRect/>
+          </a:stretch>
+        </p:blipFill>
+        <p:spPr>
+          <a:xfrm>
+            <a:off x="457200" y="3186684"/>
+            <a:ext cx="8229600" cy="1124712"/>
+          </a:xfrm>
+          <a:prstGeom prst="rect">
+            <a:avLst/>
+          </a:prstGeom>
+        </p:spPr>
+      </p:pic>
     </p:spTree>
   </p:cSld>
   <p:clrMapOvr>
@@ -4122,7 +4333,7 @@
                   <a:srgbClr val="0B3D2E"/>
                 </a:solidFill>
               </a:rPr>
-              <a:t>📖 Definiciones y características</a:t>
+              <a:t>🧠 Explicación en profundidad</a:t>
             </a:r>
           </a:p>
         </p:txBody>
@@ -4160,97 +4371,97 @@
                   <a:srgbClr val="22282E"/>
                 </a:solidFill>
               </a:rPr>
-              <a:t>•  Superficie de ataque: conjunto de puntos donde entran datos no confiables. Clave: prioriza</a:t>
-            </a:r>
-          </a:p>
-          <a:p>
-            <a:pPr>
-              <a:spcAft>
-                <a:spcPts val="600"/>
-              </a:spcAft>
-            </a:pPr>
-            <a:r>
-              <a:rPr sz="1500">
-                <a:solidFill>
-                  <a:srgbClr val="22282E"/>
-                </a:solidFill>
-              </a:rPr>
-              <a:t>•  parsers, IPC, red y ficheros.</a:t>
-            </a:r>
-          </a:p>
-          <a:p>
-            <a:pPr>
-              <a:spcAft>
-                <a:spcPts val="600"/>
-              </a:spcAft>
-            </a:pPr>
-            <a:r>
-              <a:rPr sz="1500">
-                <a:solidFill>
-                  <a:srgbClr val="22282E"/>
-                </a:solidFill>
-              </a:rPr>
-              <a:t>•  Análisis de taint: rastrea datos controlados por el usuario hasta operaciones sensibles (memcpy,</a:t>
-            </a:r>
-          </a:p>
-          <a:p>
-            <a:pPr>
-              <a:spcAft>
-                <a:spcPts val="600"/>
-              </a:spcAft>
-            </a:pPr>
-            <a:r>
-              <a:rPr sz="1500">
-                <a:solidFill>
-                  <a:srgbClr val="22282E"/>
-                </a:solidFill>
-              </a:rPr>
-              <a:t>•  índices, system). Clave: fuente→sumidero.</a:t>
-            </a:r>
-          </a:p>
-          <a:p>
-            <a:pPr>
-              <a:spcAft>
-                <a:spcPts val="600"/>
-              </a:spcAft>
-            </a:pPr>
-            <a:r>
-              <a:rPr sz="1500">
-                <a:solidFill>
-                  <a:srgbClr val="22282E"/>
-                </a:solidFill>
-              </a:rPr>
-              <a:t>•  SAST: análisis estático de seguridad sobre el código. Clave: rápido y escalable, pero genera</a:t>
-            </a:r>
-          </a:p>
-          <a:p>
-            <a:pPr>
-              <a:spcAft>
-                <a:spcPts val="600"/>
-              </a:spcAft>
-            </a:pPr>
-            <a:r>
-              <a:rPr sz="1500">
-                <a:solidFill>
-                  <a:srgbClr val="22282E"/>
-                </a:solidFill>
-              </a:rPr>
-              <a:t>•  falsos positivos.</a:t>
-            </a:r>
-          </a:p>
-          <a:p>
-            <a:pPr>
-              <a:spcAft>
-                <a:spcPts val="600"/>
-              </a:spcAft>
-            </a:pPr>
-            <a:r>
-              <a:rPr sz="1500">
-                <a:solidFill>
-                  <a:srgbClr val="22282E"/>
-                </a:solidFill>
-              </a:rPr>
-              <a:t>•  CodeQL: motor que trata el código como base de datos consultable. Clave: permite escribir queries</a:t>
+              <a:t>•  El fuzzing (clase 136) encuentra bugs ejecutando; esta clase aborda el descubrimiento por</a:t>
+            </a:r>
+          </a:p>
+          <a:p>
+            <a:pPr>
+              <a:spcAft>
+                <a:spcPts val="600"/>
+              </a:spcAft>
+            </a:pPr>
+            <a:r>
+              <a:rPr sz="1500">
+                <a:solidFill>
+                  <a:srgbClr val="22282E"/>
+                </a:solidFill>
+              </a:rPr>
+              <a:t>•  análisis del código —fuente o decompilado— buscando los patrones que conducen a vulnerabilidades.</a:t>
+            </a:r>
+          </a:p>
+          <a:p>
+            <a:pPr>
+              <a:spcAft>
+                <a:spcPts val="600"/>
+              </a:spcAft>
+            </a:pPr>
+            <a:r>
+              <a:rPr sz="1500">
+                <a:solidFill>
+                  <a:srgbClr val="22282E"/>
+                </a:solidFill>
+              </a:rPr>
+              <a:t>•  Ambos enfoques son complementarios: el fuzzing es ciego pero incansable; el análisis de código es</a:t>
+            </a:r>
+          </a:p>
+          <a:p>
+            <a:pPr>
+              <a:spcAft>
+                <a:spcPts val="600"/>
+              </a:spcAft>
+            </a:pPr>
+            <a:r>
+              <a:rPr sz="1500">
+                <a:solidFill>
+                  <a:srgbClr val="22282E"/>
+                </a:solidFill>
+              </a:rPr>
+              <a:t>•  dirigido pero requiere criterio humano. Un cazador de vulnerabilidades competente usa los dos, y el</a:t>
+            </a:r>
+          </a:p>
+          <a:p>
+            <a:pPr>
+              <a:spcAft>
+                <a:spcPts val="600"/>
+              </a:spcAft>
+            </a:pPr>
+            <a:r>
+              <a:rPr sz="1500">
+                <a:solidFill>
+                  <a:srgbClr val="22282E"/>
+                </a:solidFill>
+              </a:rPr>
+              <a:t>•  punto de partida de ambos es el mismo: identificar la superficie de ataque —por dónde entran</a:t>
+            </a:r>
+          </a:p>
+          <a:p>
+            <a:pPr>
+              <a:spcAft>
+                <a:spcPts val="600"/>
+              </a:spcAft>
+            </a:pPr>
+            <a:r>
+              <a:rPr sz="1500">
+                <a:solidFill>
+                  <a:srgbClr val="22282E"/>
+                </a:solidFill>
+              </a:rPr>
+              <a:t>•  datos que el atacante controla (entrada de red, ficheros, argumentos, variables de entorno)— porque</a:t>
+            </a:r>
+          </a:p>
+          <a:p>
+            <a:pPr>
+              <a:spcAft>
+                <a:spcPts val="600"/>
+              </a:spcAft>
+            </a:pPr>
+            <a:r>
+              <a:rPr sz="1500">
+                <a:solidFill>
+                  <a:srgbClr val="22282E"/>
+                </a:solidFill>
+              </a:rPr>
+              <a:t>•  una vulnerabilidad solo importa si es alcanzable desde una entrada controlable.</a:t>
             </a:r>
           </a:p>
         </p:txBody>
@@ -4301,7 +4512,7 @@
                   <a:srgbClr val="0B3D2E"/>
                 </a:solidFill>
               </a:rPr>
-              <a:t>🧰 Herramientas y preparación</a:t>
+              <a:t>📖 Definiciones y características</a:t>
             </a:r>
           </a:p>
         </p:txBody>
@@ -4339,22 +4550,97 @@
                   <a:srgbClr val="22282E"/>
                 </a:solidFill>
               </a:rPr>
-              <a:t>•  sudo apt install -y cppcheck clang-tools</a:t>
-            </a:r>
-          </a:p>
-          <a:p>
-            <a:pPr>
-              <a:spcAft>
-                <a:spcPts val="600"/>
-              </a:spcAft>
-            </a:pPr>
-            <a:r>
-              <a:rPr sz="1500">
-                <a:solidFill>
-                  <a:srgbClr val="22282E"/>
-                </a:solidFill>
-              </a:rPr>
-              <a:t>•  pip install semgrep</a:t>
+              <a:t>•  Superficie de ataque: conjunto de puntos donde entran datos no confiables. Clave: prioriza</a:t>
+            </a:r>
+          </a:p>
+          <a:p>
+            <a:pPr>
+              <a:spcAft>
+                <a:spcPts val="600"/>
+              </a:spcAft>
+            </a:pPr>
+            <a:r>
+              <a:rPr sz="1500">
+                <a:solidFill>
+                  <a:srgbClr val="22282E"/>
+                </a:solidFill>
+              </a:rPr>
+              <a:t>•  parsers, IPC, red y ficheros.</a:t>
+            </a:r>
+          </a:p>
+          <a:p>
+            <a:pPr>
+              <a:spcAft>
+                <a:spcPts val="600"/>
+              </a:spcAft>
+            </a:pPr>
+            <a:r>
+              <a:rPr sz="1500">
+                <a:solidFill>
+                  <a:srgbClr val="22282E"/>
+                </a:solidFill>
+              </a:rPr>
+              <a:t>•  Análisis de taint: rastrea datos controlados por el usuario hasta operaciones sensibles (memcpy,</a:t>
+            </a:r>
+          </a:p>
+          <a:p>
+            <a:pPr>
+              <a:spcAft>
+                <a:spcPts val="600"/>
+              </a:spcAft>
+            </a:pPr>
+            <a:r>
+              <a:rPr sz="1500">
+                <a:solidFill>
+                  <a:srgbClr val="22282E"/>
+                </a:solidFill>
+              </a:rPr>
+              <a:t>•  índices, system). Clave: fuente→sumidero.</a:t>
+            </a:r>
+          </a:p>
+          <a:p>
+            <a:pPr>
+              <a:spcAft>
+                <a:spcPts val="600"/>
+              </a:spcAft>
+            </a:pPr>
+            <a:r>
+              <a:rPr sz="1500">
+                <a:solidFill>
+                  <a:srgbClr val="22282E"/>
+                </a:solidFill>
+              </a:rPr>
+              <a:t>•  SAST: análisis estático de seguridad sobre el código. Clave: rápido y escalable, pero genera</a:t>
+            </a:r>
+          </a:p>
+          <a:p>
+            <a:pPr>
+              <a:spcAft>
+                <a:spcPts val="600"/>
+              </a:spcAft>
+            </a:pPr>
+            <a:r>
+              <a:rPr sz="1500">
+                <a:solidFill>
+                  <a:srgbClr val="22282E"/>
+                </a:solidFill>
+              </a:rPr>
+              <a:t>•  falsos positivos.</a:t>
+            </a:r>
+          </a:p>
+          <a:p>
+            <a:pPr>
+              <a:spcAft>
+                <a:spcPts val="600"/>
+              </a:spcAft>
+            </a:pPr>
+            <a:r>
+              <a:rPr sz="1500">
+                <a:solidFill>
+                  <a:srgbClr val="22282E"/>
+                </a:solidFill>
+              </a:rPr>
+              <a:t>•  CodeQL: motor que trata el código como base de datos consultable. Clave: permite escribir queries</a:t>
             </a:r>
           </a:p>
         </p:txBody>
@@ -4405,7 +4691,7 @@
                   <a:srgbClr val="0B3D2E"/>
                 </a:solidFill>
               </a:rPr>
-              <a:t>🧪 Laboratorio guiado</a:t>
+              <a:t>📔 Glosario</a:t>
             </a:r>
           </a:p>
         </p:txBody>
@@ -4443,97 +4729,97 @@
                   <a:srgbClr val="22282E"/>
                 </a:solidFill>
               </a:rPr>
-              <a:t>•  Modela la superficie de ataque de un proyecto C pequeño: lista funciones que reciben datos externos</a:t>
-            </a:r>
-          </a:p>
-          <a:p>
-            <a:pPr>
-              <a:spcAft>
-                <a:spcPts val="600"/>
-              </a:spcAft>
-            </a:pPr>
-            <a:r>
-              <a:rPr sz="1500">
-                <a:solidFill>
-                  <a:srgbClr val="22282E"/>
-                </a:solidFill>
-              </a:rPr>
-              <a:t>•  (argv, ficheros, red) y márcalas como fuentes.</a:t>
-            </a:r>
-          </a:p>
-          <a:p>
-            <a:pPr>
-              <a:spcAft>
-                <a:spcPts val="600"/>
-              </a:spcAft>
-            </a:pPr>
-            <a:r>
-              <a:rPr sz="1500">
-                <a:solidFill>
-                  <a:srgbClr val="22282E"/>
-                </a:solidFill>
-              </a:rPr>
-              <a:t>•  Ejecuta SAST y compara resultados:</a:t>
-            </a:r>
-          </a:p>
-          <a:p>
-            <a:pPr>
-              <a:spcAft>
-                <a:spcPts val="600"/>
-              </a:spcAft>
-            </a:pPr>
-            <a:r>
-              <a:rPr sz="1500">
-                <a:solidFill>
-                  <a:srgbClr val="22282E"/>
-                </a:solidFill>
-              </a:rPr>
-              <a:t>•  cppcheck --enable=all --inconclusive src/ 2&gt; cppcheck.txt</a:t>
-            </a:r>
-          </a:p>
-          <a:p>
-            <a:pPr>
-              <a:spcAft>
-                <a:spcPts val="600"/>
-              </a:spcAft>
-            </a:pPr>
-            <a:r>
-              <a:rPr sz="1500">
-                <a:solidFill>
-                  <a:srgbClr val="22282E"/>
-                </a:solidFill>
-              </a:rPr>
-              <a:t>•  scan-build make            # clang static analyzer</a:t>
-            </a:r>
-          </a:p>
-          <a:p>
-            <a:pPr>
-              <a:spcAft>
-                <a:spcPts val="600"/>
-              </a:spcAft>
-            </a:pPr>
-            <a:r>
-              <a:rPr sz="1500">
-                <a:solidFill>
-                  <a:srgbClr val="22282E"/>
-                </a:solidFill>
-              </a:rPr>
-              <a:t>•  semgrep --config p/c src/</a:t>
-            </a:r>
-          </a:p>
-          <a:p>
-            <a:pPr>
-              <a:spcAft>
-                <a:spcPts val="600"/>
-              </a:spcAft>
-            </a:pPr>
-            <a:r>
-              <a:rPr sz="1500">
-                <a:solidFill>
-                  <a:srgbClr val="22282E"/>
-                </a:solidFill>
-              </a:rPr>
-              <a:t>•  Sigue una advertencia real (p. ej. memcpy con tamaño controlado) desde la fuente del dato hasta el</a:t>
+              <a:t>•  Término — Definición concisa</a:t>
+            </a:r>
+          </a:p>
+          <a:p>
+            <a:pPr>
+              <a:spcAft>
+                <a:spcPts val="600"/>
+              </a:spcAft>
+            </a:pPr>
+            <a:r>
+              <a:rPr sz="1500">
+                <a:solidFill>
+                  <a:srgbClr val="22282E"/>
+                </a:solidFill>
+              </a:rPr>
+              <a:t>•  Descubrimiento de vulnerabilidades — Encontrar fallos analizando el código</a:t>
+            </a:r>
+          </a:p>
+          <a:p>
+            <a:pPr>
+              <a:spcAft>
+                <a:spcPts val="600"/>
+              </a:spcAft>
+            </a:pPr>
+            <a:r>
+              <a:rPr sz="1500">
+                <a:solidFill>
+                  <a:srgbClr val="22282E"/>
+                </a:solidFill>
+              </a:rPr>
+              <a:t>•  Superficie de ataque — Por dónde entran datos controlables por el atacante</a:t>
+            </a:r>
+          </a:p>
+          <a:p>
+            <a:pPr>
+              <a:spcAft>
+                <a:spcPts val="600"/>
+              </a:spcAft>
+            </a:pPr>
+            <a:r>
+              <a:rPr sz="1500">
+                <a:solidFill>
+                  <a:srgbClr val="22282E"/>
+                </a:solidFill>
+              </a:rPr>
+              <a:t>•  Fuente (source) — Origen de un dato controlable (recv, read, argv)</a:t>
+            </a:r>
+          </a:p>
+          <a:p>
+            <a:pPr>
+              <a:spcAft>
+                <a:spcPts val="600"/>
+              </a:spcAft>
+            </a:pPr>
+            <a:r>
+              <a:rPr sz="1500">
+                <a:solidFill>
+                  <a:srgbClr val="22282E"/>
+                </a:solidFill>
+              </a:rPr>
+              <a:t>•  Patrón peligroso — Construcción con fallo conocido (strcpy, malloc(nm)…)</a:t>
+            </a:r>
+          </a:p>
+          <a:p>
+            <a:pPr>
+              <a:spcAft>
+                <a:spcPts val="600"/>
+              </a:spcAft>
+            </a:pPr>
+            <a:r>
+              <a:rPr sz="1500">
+                <a:solidFill>
+                  <a:srgbClr val="22282E"/>
+                </a:solidFill>
+              </a:rPr>
+              <a:t>•  Taint tracking — Rastrear la propagación de un dato contaminado</a:t>
+            </a:r>
+          </a:p>
+          <a:p>
+            <a:pPr>
+              <a:spcAft>
+                <a:spcPts val="600"/>
+              </a:spcAft>
+            </a:pPr>
+            <a:r>
+              <a:rPr sz="1500">
+                <a:solidFill>
+                  <a:srgbClr val="22282E"/>
+                </a:solidFill>
+              </a:rPr>
+              <a:t>•  Dato contaminado (tainted) — Valor que procede de una fuente no confiable</a:t>
             </a:r>
           </a:p>
         </p:txBody>
@@ -4584,7 +4870,7 @@
                   <a:srgbClr val="0B3D2E"/>
                 </a:solidFill>
               </a:rPr>
-              <a:t>✍️ Ejercicios</a:t>
+              <a:t>🧪 Laboratorio guiado</a:t>
             </a:r>
           </a:p>
         </p:txBody>
@@ -4622,82 +4908,97 @@
                   <a:srgbClr val="22282E"/>
                 </a:solidFill>
               </a:rPr>
-              <a:t>•  Dibuja el diagrama de superficie de ataque de un servicio que lee de red.</a:t>
-            </a:r>
-          </a:p>
-          <a:p>
-            <a:pPr>
-              <a:spcAft>
-                <a:spcPts val="600"/>
-              </a:spcAft>
-            </a:pPr>
-            <a:r>
-              <a:rPr sz="1500">
-                <a:solidFill>
-                  <a:srgbClr val="22282E"/>
-                </a:solidFill>
-              </a:rPr>
-              <a:t>•  Encuentra manualmente un sprintf sin límite y explica el riesgo.</a:t>
-            </a:r>
-          </a:p>
-          <a:p>
-            <a:pPr>
-              <a:spcAft>
-                <a:spcPts val="600"/>
-              </a:spcAft>
-            </a:pPr>
-            <a:r>
-              <a:rPr sz="1500">
-                <a:solidFill>
-                  <a:srgbClr val="22282E"/>
-                </a:solidFill>
-              </a:rPr>
-              <a:t>•  Compara los hallazgos de cppcheck vs Semgrep en el mismo código.</a:t>
-            </a:r>
-          </a:p>
-          <a:p>
-            <a:pPr>
-              <a:spcAft>
-                <a:spcPts val="600"/>
-              </a:spcAft>
-            </a:pPr>
-            <a:r>
-              <a:rPr sz="1500">
-                <a:solidFill>
-                  <a:srgbClr val="22282E"/>
-                </a:solidFill>
-              </a:rPr>
-              <a:t>•  Escribe una regla Semgrep que detecte gets(.</a:t>
-            </a:r>
-          </a:p>
-          <a:p>
-            <a:pPr>
-              <a:spcAft>
-                <a:spcPts val="600"/>
-              </a:spcAft>
-            </a:pPr>
-            <a:r>
-              <a:rPr sz="1500">
-                <a:solidFill>
-                  <a:srgbClr val="22282E"/>
-                </a:solidFill>
-              </a:rPr>
-              <a:t>•  Clasifica 5 hallazgos por explotabilidad e impacto.</a:t>
-            </a:r>
-          </a:p>
-          <a:p>
-            <a:pPr>
-              <a:spcAft>
-                <a:spcPts val="600"/>
-              </a:spcAft>
-            </a:pPr>
-            <a:r>
-              <a:rPr sz="1500">
-                <a:solidFill>
-                  <a:srgbClr val="22282E"/>
-                </a:solidFill>
-              </a:rPr>
-              <a:t>•  Redacta el cuerpo de un reporte de divulgación responsable.</a:t>
+              <a:t>•  Modela la superficie de ataque de un proyecto C pequeño: lista funciones que reciben datos externos</a:t>
+            </a:r>
+          </a:p>
+          <a:p>
+            <a:pPr>
+              <a:spcAft>
+                <a:spcPts val="600"/>
+              </a:spcAft>
+            </a:pPr>
+            <a:r>
+              <a:rPr sz="1500">
+                <a:solidFill>
+                  <a:srgbClr val="22282E"/>
+                </a:solidFill>
+              </a:rPr>
+              <a:t>•  (argv, ficheros, red) y márcalas como fuentes.</a:t>
+            </a:r>
+          </a:p>
+          <a:p>
+            <a:pPr>
+              <a:spcAft>
+                <a:spcPts val="600"/>
+              </a:spcAft>
+            </a:pPr>
+            <a:r>
+              <a:rPr sz="1500">
+                <a:solidFill>
+                  <a:srgbClr val="22282E"/>
+                </a:solidFill>
+              </a:rPr>
+              <a:t>•  Ejecuta SAST y compara resultados:</a:t>
+            </a:r>
+          </a:p>
+          <a:p>
+            <a:pPr>
+              <a:spcAft>
+                <a:spcPts val="600"/>
+              </a:spcAft>
+            </a:pPr>
+            <a:r>
+              <a:rPr sz="1500">
+                <a:solidFill>
+                  <a:srgbClr val="22282E"/>
+                </a:solidFill>
+              </a:rPr>
+              <a:t>•  Sigue una advertencia real (p. ej. memcpy con tamaño controlado) desde la fuente del dato hasta el</a:t>
+            </a:r>
+          </a:p>
+          <a:p>
+            <a:pPr>
+              <a:spcAft>
+                <a:spcPts val="600"/>
+              </a:spcAft>
+            </a:pPr>
+            <a:r>
+              <a:rPr sz="1500">
+                <a:solidFill>
+                  <a:srgbClr val="22282E"/>
+                </a:solidFill>
+              </a:rPr>
+              <a:t>•  sumidero, confirmando si es explotable o falso positivo.</a:t>
+            </a:r>
+          </a:p>
+          <a:p>
+            <a:pPr>
+              <a:spcAft>
+                <a:spcPts val="600"/>
+              </a:spcAft>
+            </a:pPr>
+            <a:r>
+              <a:rPr sz="1500">
+                <a:solidFill>
+                  <a:srgbClr val="22282E"/>
+                </a:solidFill>
+              </a:rPr>
+              <a:t>•  Escribe una consulta CodeQL sencilla que localice llamadas a strcpy con origen no acotado (o parte</a:t>
+            </a:r>
+          </a:p>
+          <a:p>
+            <a:pPr>
+              <a:spcAft>
+                <a:spcPts val="600"/>
+              </a:spcAft>
+            </a:pPr>
+            <a:r>
+              <a:rPr sz="1500">
+                <a:solidFill>
+                  <a:srgbClr val="22282E"/>
+                </a:solidFill>
+              </a:rPr>
+              <a:t>•  de una query de ejemplo del repo de CodeQL) y ejecútala sobre la base del proyecto.</a:t>
             </a:r>
           </a:p>
         </p:txBody>
@@ -4748,7 +5049,7 @@
                   <a:srgbClr val="0B3D2E"/>
                 </a:solidFill>
               </a:rPr>
-              <a:t>📝 Reto verificable</a:t>
+              <a:t>✍️ Ejercicios</a:t>
             </a:r>
           </a:p>
         </p:txBody>
@@ -4786,52 +5087,82 @@
                   <a:srgbClr val="22282E"/>
                 </a:solidFill>
               </a:rPr>
-              <a:t>•  Audita un proyecto C pequeño (propio o open source con permiso), identifica una vulnerabilidad real,</a:t>
-            </a:r>
-          </a:p>
-          <a:p>
-            <a:pPr>
-              <a:spcAft>
-                <a:spcPts val="600"/>
-              </a:spcAft>
-            </a:pPr>
-            <a:r>
-              <a:rPr sz="1500">
-                <a:solidFill>
-                  <a:srgbClr val="22282E"/>
-                </a:solidFill>
-              </a:rPr>
-              <a:t>•  demuéstrala con una PoC mínima y redacta el reporte de divulgación.</a:t>
-            </a:r>
-          </a:p>
-          <a:p>
-            <a:pPr>
-              <a:spcAft>
-                <a:spcPts val="600"/>
-              </a:spcAft>
-            </a:pPr>
-            <a:r>
-              <a:rPr sz="1500">
-                <a:solidFill>
-                  <a:srgbClr val="22282E"/>
-                </a:solidFill>
-              </a:rPr>
-              <a:t>•  Criterio de aceptación: entregas la ubicación exacta del bug (archivo:línea), una PoC que lo</a:t>
-            </a:r>
-          </a:p>
-          <a:p>
-            <a:pPr>
-              <a:spcAft>
-                <a:spcPts val="600"/>
-              </a:spcAft>
-            </a:pPr>
-            <a:r>
-              <a:rPr sz="1500">
-                <a:solidFill>
-                  <a:srgbClr val="22282E"/>
-                </a:solidFill>
-              </a:rPr>
-              <a:t>•  dispara y un reporte con impacto, versiones y mitigación propuesta.</a:t>
+              <a:t>•  Dibuja el diagrama de superficie de ataque de un servicio que lee de red.</a:t>
+            </a:r>
+          </a:p>
+          <a:p>
+            <a:pPr>
+              <a:spcAft>
+                <a:spcPts val="600"/>
+              </a:spcAft>
+            </a:pPr>
+            <a:r>
+              <a:rPr sz="1500">
+                <a:solidFill>
+                  <a:srgbClr val="22282E"/>
+                </a:solidFill>
+              </a:rPr>
+              <a:t>•  Encuentra manualmente un sprintf sin límite y explica el riesgo.</a:t>
+            </a:r>
+          </a:p>
+          <a:p>
+            <a:pPr>
+              <a:spcAft>
+                <a:spcPts val="600"/>
+              </a:spcAft>
+            </a:pPr>
+            <a:r>
+              <a:rPr sz="1500">
+                <a:solidFill>
+                  <a:srgbClr val="22282E"/>
+                </a:solidFill>
+              </a:rPr>
+              <a:t>•  Compara los hallazgos de cppcheck vs Semgrep en el mismo código.</a:t>
+            </a:r>
+          </a:p>
+          <a:p>
+            <a:pPr>
+              <a:spcAft>
+                <a:spcPts val="600"/>
+              </a:spcAft>
+            </a:pPr>
+            <a:r>
+              <a:rPr sz="1500">
+                <a:solidFill>
+                  <a:srgbClr val="22282E"/>
+                </a:solidFill>
+              </a:rPr>
+              <a:t>•  Escribe una regla Semgrep que detecte gets(.</a:t>
+            </a:r>
+          </a:p>
+          <a:p>
+            <a:pPr>
+              <a:spcAft>
+                <a:spcPts val="600"/>
+              </a:spcAft>
+            </a:pPr>
+            <a:r>
+              <a:rPr sz="1500">
+                <a:solidFill>
+                  <a:srgbClr val="22282E"/>
+                </a:solidFill>
+              </a:rPr>
+              <a:t>•  Clasifica 5 hallazgos por explotabilidad e impacto.</a:t>
+            </a:r>
+          </a:p>
+          <a:p>
+            <a:pPr>
+              <a:spcAft>
+                <a:spcPts val="600"/>
+              </a:spcAft>
+            </a:pPr>
+            <a:r>
+              <a:rPr sz="1500">
+                <a:solidFill>
+                  <a:srgbClr val="22282E"/>
+                </a:solidFill>
+              </a:rPr>
+              <a:t>•  Redacta el cuerpo de un reporte de divulgación responsable.</a:t>
             </a:r>
           </a:p>
         </p:txBody>
